--- a/10-Knowledge-Products/KP1-GEA/videos/module_3/en/decks/KP1_M3_Deck_v0.2.pptx
+++ b/10-Knowledge-Products/KP1-GEA/videos/module_3/en/decks/KP1_M3_Deck_v0.2.pptx
@@ -16904,7 +16904,7 @@
                 </a:solidFill>
                 <a:latin typeface="Arial"/>
               </a:rPr>
-              <a:t>~4 minutes · standalone video · voice-over on text slides</a:t>
+              <a:t>standalone video · voice-over on text slides</a:t>
             </a:r>
           </a:p>
         </p:txBody>
@@ -19443,7 +19443,7 @@
                 </a:solidFill>
                 <a:latin typeface="Arial"/>
               </a:rPr>
-              <a:t>~4 minutes · standalone video · voice-over on text slides</a:t>
+              <a:t>standalone video · voice-over on text slides</a:t>
             </a:r>
           </a:p>
         </p:txBody>
@@ -22369,7 +22369,7 @@
                 </a:solidFill>
                 <a:latin typeface="Arial"/>
               </a:rPr>
-              <a:t>~4 minutes · standalone video · voice-over on text slides</a:t>
+              <a:t>standalone video · voice-over on text slides</a:t>
             </a:r>
           </a:p>
         </p:txBody>
@@ -22557,7 +22557,7 @@
                 </a:solidFill>
                 <a:latin typeface="Arial"/>
               </a:rPr>
-              <a:t>~4 minutes · standalone video · voice-over on text slides</a:t>
+              <a:t>standalone video · voice-over on text slides</a:t>
             </a:r>
           </a:p>
         </p:txBody>
@@ -25643,7 +25643,7 @@
                 </a:solidFill>
                 <a:latin typeface="Arial"/>
               </a:rPr>
-              <a:t>~4 minutes · standalone video · voice-over on text slides</a:t>
+              <a:t>standalone video · voice-over on text slides</a:t>
             </a:r>
           </a:p>
         </p:txBody>
@@ -28815,7 +28815,7 @@
                 </a:solidFill>
                 <a:latin typeface="Arial"/>
               </a:rPr>
-              <a:t>~4 minutes · standalone video · voice-over on text slides</a:t>
+              <a:t>standalone video · voice-over on text slides</a:t>
             </a:r>
           </a:p>
         </p:txBody>
@@ -31949,7 +31949,7 @@
                 </a:solidFill>
                 <a:latin typeface="Arial"/>
               </a:rPr>
-              <a:t>~5 minutes · standalone video · voice-over on text slides</a:t>
+              <a:t>standalone video · voice-over on text slides</a:t>
             </a:r>
           </a:p>
         </p:txBody>

--- a/10-Knowledge-Products/KP1-GEA/videos/module_3/en/decks/KP1_M3_Deck_v0.2.pptx
+++ b/10-Knowledge-Products/KP1-GEA/videos/module_3/en/decks/KP1_M3_Deck_v0.2.pptx
@@ -16768,7 +16768,7 @@
                 </a:solidFill>
                 <a:latin typeface="Arial"/>
               </a:rPr>
-              <a:t>KP1 · MODULE 3 · VIDEO 3.2</a:t>
+              <a:t>MODULE 3 · VIDEO 3.2</a:t>
             </a:r>
           </a:p>
         </p:txBody>
@@ -19307,7 +19307,7 @@
                 </a:solidFill>
                 <a:latin typeface="Arial"/>
               </a:rPr>
-              <a:t>KP1 · MODULE 3 · VIDEO 3.3</a:t>
+              <a:t>MODULE 3 · VIDEO 3.3</a:t>
             </a:r>
           </a:p>
         </p:txBody>
@@ -22233,7 +22233,7 @@
                 </a:solidFill>
                 <a:latin typeface="Arial"/>
               </a:rPr>
-              <a:t>KP1 · MODULE 3 · VIDEO 3.4</a:t>
+              <a:t>MODULE 3 · VIDEO 3.4</a:t>
             </a:r>
           </a:p>
         </p:txBody>
@@ -22421,7 +22421,7 @@
                 </a:solidFill>
                 <a:latin typeface="Arial"/>
               </a:rPr>
-              <a:t>KP1 · MODULE 3 · VIDEO 3.1</a:t>
+              <a:t>MODULE 3 · VIDEO 3.1</a:t>
             </a:r>
           </a:p>
         </p:txBody>
@@ -25507,7 +25507,7 @@
                 </a:solidFill>
                 <a:latin typeface="Arial"/>
               </a:rPr>
-              <a:t>KP1 · MODULE 3 · VIDEO 3.5</a:t>
+              <a:t>MODULE 3 · VIDEO 3.5</a:t>
             </a:r>
           </a:p>
         </p:txBody>
@@ -28679,7 +28679,7 @@
                 </a:solidFill>
                 <a:latin typeface="Arial"/>
               </a:rPr>
-              <a:t>KP1 · MODULE 3 · VIDEO 3.6</a:t>
+              <a:t>MODULE 3 · VIDEO 3.6</a:t>
             </a:r>
           </a:p>
         </p:txBody>
@@ -31813,7 +31813,7 @@
                 </a:solidFill>
                 <a:latin typeface="Arial"/>
               </a:rPr>
-              <a:t>KP1 · MODULE 3 · VIDEO 3.7</a:t>
+              <a:t>MODULE 3 · VIDEO 3.7</a:t>
             </a:r>
           </a:p>
         </p:txBody>
